--- a/e2e/fixtures/master-views.pptx
+++ b/e2e/fixtures/master-views.pptx
@@ -545,12 +545,10 @@
           <a:bodyPr wrap="square"/>
           <a:lstStyle/>
           <a:p>
-            <a:pPr/>
             <a:r>
               <a:rPr lang="en-US" dirty="0"/>
               <a:t>MASTER-VIEWS-SLIDE</a:t>
             </a:r>
-            <a:endParaRPr lang="en-US"/>
           </a:p>
         </p:txBody>
       </p:sp>
